--- a/public/fun/pack/pptx/newspro/카드뉴스프리미엄_21_알뜰생활팁_스카이펄.pptx
+++ b/public/fun/pack/pptx/newspro/카드뉴스프리미엄_21_알뜰생활팁_스카이펄.pptx
@@ -113,12 +113,12 @@
   <p:extLst>
     <p:ext uri="{521415D9-36F7-43E2-AB2F-B90AF26B5E84}">
       <p14:sectionLst xmlns:p14="http://schemas.microsoft.com/office/powerpoint/2010/main">
-        <p14:section name="시작" id="{796502A4-C14A-4842-B059-5E550A86CE8B}">
+        <p14:section name="시작" id="{4E49318E-59EA-4BBE-A71F-D40A806C20EA}">
           <p14:sldIdLst>
             <p14:sldId id="256"/>
           </p14:sldIdLst>
         </p14:section>
-        <p14:section name="본문" id="{1B64ED69-EFC0-4759-9F67-FC87DD94F5C7}">
+        <p14:section name="본문" id="{D724EF2A-E5B9-4A0E-A9D6-E92636B092C8}">
           <p14:sldIdLst>
             <p14:sldId id="257"/>
             <p14:sldId id="258"/>
@@ -127,7 +127,7 @@
             <p14:sldId id="261"/>
           </p14:sldIdLst>
         </p14:section>
-        <p14:section name="마무리" id="{4E4146E8-01F8-4354-9544-1500E72E7F9A}">
+        <p14:section name="마무리" id="{4E5B8C91-2528-40EF-8B39-900BD3365BCF}">
           <p14:sldIdLst>
             <p14:sldId id="262"/>
           </p14:sldIdLst>
@@ -1387,7 +1387,7 @@
             </a:lvl1pPr>
           </a:lstStyle>
           <a:p>
-            <a:fld id="{3D732D06-61D4-4759-9079-731767AA1A0D}" type="slidenum">
+            <a:fld id="{3DF56842-C34C-4BA6-B7B1-6CC5949D537C}" type="slidenum">
               <a:rPr lang="en-US"/>
               <a:t>‹#›</a:t>
             </a:fld>
@@ -1974,7 +1974,7 @@
             </a:lvl1pPr>
           </a:lstStyle>
           <a:p>
-            <a:fld id="{87F5F4AE-0474-47AC-AFBA-E9B9FCB75362}" type="slidenum">
+            <a:fld id="{BEC1359B-3E09-4C68-8FF1-5445081AC984}" type="slidenum">
               <a:rPr lang="en-US"/>
               <a:t>‹#›</a:t>
             </a:fld>
@@ -2662,7 +2662,7 @@
             </a:lvl1pPr>
           </a:lstStyle>
           <a:p>
-            <a:fld id="{A0E0CDCE-F2E1-49B6-985E-568AB14056E0}" type="slidenum">
+            <a:fld id="{625D4B49-7057-4C93-8FA0-C5E15E583688}" type="slidenum">
               <a:rPr lang="en-US"/>
               <a:t>‹#›</a:t>
             </a:fld>
@@ -3529,7 +3529,7 @@
           <a:p>
             <a:r>
               <a:rPr lang="ko-KR"/>
-              <a:t>여름 전기요금 줄이는 다섯 가지</a:t>
+              <a:t>전기요금 줄이는 다섯 가지</a:t>
             </a:r>
           </a:p>
         </p:txBody>
@@ -3658,7 +3658,7 @@
           <a:bodyPr/>
           <a:lstStyle/>
           <a:p>
-            <a:fld id="{80FD6EF3-F835-4A1A-8836-CAFB5CEA3238}" type="slidenum">
+            <a:fld id="{36CE2C8B-4CFE-4168-BC72-A84F3CCD55D4}" type="slidenum">
               <a:rPr lang="en-US"/>
               <a:t>‹#›</a:t>
             </a:fld>
@@ -3824,7 +3824,7 @@
           <a:bodyPr/>
           <a:lstStyle/>
           <a:p>
-            <a:fld id="{3D57DA57-4C04-4A17-8F54-E119125495F4}" type="slidenum">
+            <a:fld id="{EF0B373C-97C8-46F2-BEA2-097B07858F96}" type="slidenum">
               <a:rPr lang="en-US"/>
               <a:t>‹#›</a:t>
             </a:fld>
@@ -3990,7 +3990,7 @@
           <a:bodyPr/>
           <a:lstStyle/>
           <a:p>
-            <a:fld id="{07DFEA74-C3D6-48FE-89E3-37EF7BC62C17}" type="slidenum">
+            <a:fld id="{75AE8135-E96D-40FC-8C20-1C37160ECE98}" type="slidenum">
               <a:rPr lang="en-US"/>
               <a:t>‹#›</a:t>
             </a:fld>
@@ -4156,7 +4156,7 @@
           <a:bodyPr/>
           <a:lstStyle/>
           <a:p>
-            <a:fld id="{8E7727F0-B166-41B2-8E4D-BE2EEAD5055B}" type="slidenum">
+            <a:fld id="{20A76626-31A6-46D0-8C53-9787BA43824D}" type="slidenum">
               <a:rPr lang="en-US"/>
               <a:t>‹#›</a:t>
             </a:fld>
@@ -4322,7 +4322,7 @@
           <a:bodyPr/>
           <a:lstStyle/>
           <a:p>
-            <a:fld id="{119048F3-2B00-4F47-A901-D5FC54B2AE0B}" type="slidenum">
+            <a:fld id="{2A28CE4A-CC0F-4D49-9B3A-F2795D767C30}" type="slidenum">
               <a:rPr lang="en-US"/>
               <a:t>‹#›</a:t>
             </a:fld>
